--- a/site/lectures/week05-session1.pptx
+++ b/site/lectures/week05-session1.pptx
@@ -8189,8 +8189,8 @@
         </p:blipFill>
         <p:spPr>
           <a:xfrm>
-            <a:off x="606540" y="1280160"/>
-            <a:ext cx="10978615" cy="2730132"/>
+            <a:off x="1061751" y="1280160"/>
+            <a:ext cx="10068193" cy="2730132"/>
           </a:xfrm>
           <a:prstGeom prst="rect">
             <a:avLst/>
